--- a/Documentation/deck/ANGEL-SWARM-pitch.pptx
+++ b/Documentation/deck/ANGEL-SWARM-pitch.pptx
@@ -4,14 +4,14 @@
   <p:sldMasterIdLst>
     <p:sldMasterId id="2147483648" r:id="rId1"/>
   </p:sldMasterIdLst>
+  <p:notesMasterIdLst>
+    <p:notesMasterId r:id="rId5"/>
+  </p:notesMasterIdLst>
   <p:sldIdLst>
     <p:sldId id="256" r:id="rId2"/>
     <p:sldId id="257" r:id="rId3"/>
     <p:sldId id="258" r:id="rId4"/>
   </p:sldIdLst>
-  <p:notesMasterIdLst>
-    <p:notesMasterId r:id="rId5"/>
-  </p:notesMasterIdLst>
   <p:sldSz cx="12192000" cy="6858000"/>
   <p:notesSz cx="6858000" cy="12192000"/>
   <p:defaultTextStyle>
@@ -106,6 +106,11 @@
       </a:defRPr>
     </a:lvl9pPr>
   </p:defaultTextStyle>
+  <p:extLst>
+    <p:ext uri="{EFAFB233-063F-42B5-8137-9DF3F51BA10A}">
+      <p15:sldGuideLst xmlns:p15="http://schemas.microsoft.com/office/powerpoint/2012/main"/>
+    </p:ext>
+  </p:extLst>
 </p:presentation>
 </file>
 
@@ -131,234 +136,10 @@
           <a:chExt cx="0" cy="0"/>
         </a:xfrm>
       </p:grpSpPr>
-      <p:sp>
-        <p:nvSpPr>
-          <p:cNvPr id="2" name="Header Placeholder 1"/>
-          <p:cNvSpPr>
-            <a:spLocks noGrp="1"/>
-          </p:cNvSpPr>
-          <p:nvPr>
-            <p:ph type="hdr" sz="quarter"/>
-          </p:nvPr>
-        </p:nvSpPr>
-        <p:spPr>
-          <a:xfrm>
-            <a:off x="0" y="0"/>
-            <a:ext cx="2971800" cy="458788"/>
-          </a:xfrm>
-          <a:prstGeom prst="rect">
-            <a:avLst/>
-          </a:prstGeom>
-        </p:spPr>
-        <p:txBody>
-          <a:bodyPr vert="horz" lIns="91440" tIns="45720" rIns="91440" bIns="45720" rtlCol="0"/>
-          <a:lstStyle>
-            <a:lvl1pPr algn="l">
-              <a:defRPr sz="1200"/>
-            </a:lvl1pPr>
-          </a:lstStyle>
-          <a:p>
-            <a:endParaRPr lang="en-US"/>
-          </a:p>
-        </p:txBody>
-      </p:sp>
-      <p:sp>
-        <p:nvSpPr>
-          <p:cNvPr id="3" name="Date Placeholder 2"/>
-          <p:cNvSpPr>
-            <a:spLocks noGrp="1"/>
-          </p:cNvSpPr>
-          <p:nvPr>
-            <p:ph type="dt" idx="1"/>
-          </p:nvPr>
-        </p:nvSpPr>
-        <p:spPr>
-          <a:xfrm>
-            <a:off x="3884613" y="0"/>
-            <a:ext cx="2971800" cy="458788"/>
-          </a:xfrm>
-          <a:prstGeom prst="rect">
-            <a:avLst/>
-          </a:prstGeom>
-        </p:spPr>
-        <p:txBody>
-          <a:bodyPr vert="horz" lIns="91440" tIns="45720" rIns="91440" bIns="45720" rtlCol="0"/>
-          <a:lstStyle>
-            <a:lvl1pPr algn="r">
-              <a:defRPr sz="1200"/>
-            </a:lvl1pPr>
-          </a:lstStyle>
-          <a:p>
-            <a:fld id="{5282F153-3F37-0F45-9E97-73ACFA13230C}" type="datetimeFigureOut">
-              <a:rPr lang="en-US"/>
-              <a:t>7/23/19</a:t>
-            </a:fld>
-            <a:endParaRPr lang="en-US"/>
-          </a:p>
-        </p:txBody>
-      </p:sp>
-      <p:sp>
-        <p:nvSpPr>
-          <p:cNvPr id="4" name="Slide Image Placeholder 3"/>
-          <p:cNvSpPr>
-            <a:spLocks noGrp="1" noRot="1" noChangeAspect="1"/>
-          </p:cNvSpPr>
-          <p:nvPr>
-            <p:ph type="sldImg" idx="2"/>
-          </p:nvPr>
-        </p:nvSpPr>
-        <p:spPr>
-          <a:xfrm>
-            <a:off x="685800" y="1143000"/>
-            <a:ext cx="5486400" cy="3086100"/>
-          </a:xfrm>
-          <a:prstGeom prst="rect">
-            <a:avLst/>
-          </a:prstGeom>
-          <a:noFill/>
-          <a:ln w="12700">
-            <a:solidFill>
-              <a:prstClr val="black"/>
-            </a:solidFill>
-          </a:ln>
-        </p:spPr>
-        <p:txBody>
-          <a:bodyPr vert="horz" lIns="91440" tIns="45720" rIns="91440" bIns="45720" rtlCol="0" anchor="ctr"/>
-          <a:lstStyle/>
-          <a:p>
-            <a:endParaRPr lang="en-US"/>
-          </a:p>
-        </p:txBody>
-      </p:sp>
-      <p:sp>
-        <p:nvSpPr>
-          <p:cNvPr id="5" name="Notes Placeholder 4"/>
-          <p:cNvSpPr>
-            <a:spLocks noGrp="1"/>
-          </p:cNvSpPr>
-          <p:nvPr>
-            <p:ph type="body" sz="quarter" idx="3"/>
-          </p:nvPr>
-        </p:nvSpPr>
-        <p:spPr>
-          <a:xfrm>
-            <a:off x="685800" y="4400550"/>
-            <a:ext cx="5486400" cy="3600450"/>
-          </a:xfrm>
-          <a:prstGeom prst="rect">
-            <a:avLst/>
-          </a:prstGeom>
-        </p:spPr>
-        <p:txBody>
-          <a:bodyPr vert="horz" lIns="91440" tIns="45720" rIns="91440" bIns="45720" rtlCol="0"/>
-          <a:lstStyle/>
-          <a:p>
-            <a:pPr lvl="0"/>
-            <a:r>
-              <a:rPr lang="en-US"/>
-              <a:t>Click to edit Master text styles</a:t>
-            </a:r>
-          </a:p>
-          <a:p>
-            <a:pPr lvl="1"/>
-            <a:r>
-              <a:rPr lang="en-US"/>
-              <a:t>Second level</a:t>
-            </a:r>
-          </a:p>
-          <a:p>
-            <a:pPr lvl="2"/>
-            <a:r>
-              <a:rPr lang="en-US"/>
-              <a:t>Third level</a:t>
-            </a:r>
-          </a:p>
-          <a:p>
-            <a:pPr lvl="3"/>
-            <a:r>
-              <a:rPr lang="en-US"/>
-              <a:t>Fourth level</a:t>
-            </a:r>
-          </a:p>
-          <a:p>
-            <a:pPr lvl="4"/>
-            <a:r>
-              <a:rPr lang="en-US"/>
-              <a:t>Fifth level</a:t>
-            </a:r>
-          </a:p>
-        </p:txBody>
-      </p:sp>
-      <p:sp>
-        <p:nvSpPr>
-          <p:cNvPr id="6" name="Footer Placeholder 5"/>
-          <p:cNvSpPr>
-            <a:spLocks noGrp="1"/>
-          </p:cNvSpPr>
-          <p:nvPr>
-            <p:ph type="ftr" sz="quarter" idx="4"/>
-          </p:nvPr>
-        </p:nvSpPr>
-        <p:spPr>
-          <a:xfrm>
-            <a:off x="0" y="8685213"/>
-            <a:ext cx="2971800" cy="458787"/>
-          </a:xfrm>
-          <a:prstGeom prst="rect">
-            <a:avLst/>
-          </a:prstGeom>
-        </p:spPr>
-        <p:txBody>
-          <a:bodyPr vert="horz" lIns="91440" tIns="45720" rIns="91440" bIns="45720" rtlCol="0" anchor="b"/>
-          <a:lstStyle>
-            <a:lvl1pPr algn="l">
-              <a:defRPr sz="1200"/>
-            </a:lvl1pPr>
-          </a:lstStyle>
-          <a:p>
-            <a:endParaRPr lang="en-US"/>
-          </a:p>
-        </p:txBody>
-      </p:sp>
-      <p:sp>
-        <p:nvSpPr>
-          <p:cNvPr id="7" name="Slide Number Placeholder 6"/>
-          <p:cNvSpPr>
-            <a:spLocks noGrp="1"/>
-          </p:cNvSpPr>
-          <p:nvPr>
-            <p:ph type="sldNum" sz="quarter" idx="5"/>
-          </p:nvPr>
-        </p:nvSpPr>
-        <p:spPr>
-          <a:xfrm>
-            <a:off x="3884613" y="8685213"/>
-            <a:ext cx="2971800" cy="458787"/>
-          </a:xfrm>
-          <a:prstGeom prst="rect">
-            <a:avLst/>
-          </a:prstGeom>
-        </p:spPr>
-        <p:txBody>
-          <a:bodyPr vert="horz" lIns="91440" tIns="45720" rIns="91440" bIns="45720" rtlCol="0" anchor="b"/>
-          <a:lstStyle>
-            <a:lvl1pPr algn="r">
-              <a:defRPr sz="1200"/>
-            </a:lvl1pPr>
-          </a:lstStyle>
-          <a:p>
-            <a:fld id="{CE5E9CC1-C706-0F49-92D6-E571CC5EEA8F}" type="slidenum">
-              <a:rPr lang="en-US"/>
-              <a:t>‹#›</a:t>
-            </a:fld>
-            <a:endParaRPr lang="en-US"/>
-          </a:p>
-        </p:txBody>
-      </p:sp>
     </p:spTree>
     <p:extLst>
       <p:ext uri="{BB962C8B-B14F-4D97-AF65-F5344CB8AC3E}">
-        <p14:creationId xmlns:p14="http://schemas.microsoft.com/office/powerpoint/2010/main" val="1024086991"/>
+        <p14:creationId xmlns:p14="http://schemas.microsoft.com/office/powerpoint/2010/main" val="2542299258"/>
       </p:ext>
     </p:extLst>
   </p:cSld>
@@ -506,7 +287,6 @@
               <a:rPr lang="en-US" dirty="0"/>
               <a:t>One idea. A wounded soldier’s own physiology tells you how long he has before his body can no longer compensate for the blood he has lost. Nothing between that soldier and the aircraft carrying his blood listens to it. Three facts set the problem: evacuation is three days away, blood resupply fails in two, and the vital sign everyone watches does not move in a third of these patients.</a:t>
             </a:r>
-            <a:endParaRPr lang="en-US" dirty="0"/>
           </a:p>
         </p:txBody>
       </p:sp>
@@ -594,7 +374,6 @@
               <a:rPr lang="en-US" dirty="0"/>
               <a:t>Four steps. Sense the reserve off the monitor he already wears, over the feed the force already carries. Predict the minutes he has left — and refuse to answer when the signal is bad. Task the aircraft against that deadline. Then prove it: run the same battle twice, once each way, and score it on one number.</a:t>
             </a:r>
-            <a:endParaRPr lang="en-US" dirty="0"/>
           </a:p>
         </p:txBody>
       </p:sp>
@@ -682,7 +461,6 @@
               <a:rPr lang="en-US" dirty="0"/>
               <a:t>Twenty-three against thirty-four. The only variable is what decides where the aircraft goes. Zero of two hundred replications came out worse. And the honest part, which I would rather you heard from me than found for yourself: buying more aircraft does not fix this — the fleet can triple and the toll does not move. Moving a launch point forward does. Ninety seconds and I will show you.</a:t>
             </a:r>
-            <a:endParaRPr lang="en-US" dirty="0"/>
           </a:p>
         </p:txBody>
       </p:sp>
@@ -755,6 +533,11 @@
 <file path=ppt/slideMasters/slideMaster1.xml><?xml version="1.0" encoding="utf-8"?>
 <p:sldMaster xmlns:a="http://schemas.openxmlformats.org/drawingml/2006/main" xmlns:r="http://schemas.openxmlformats.org/officeDocument/2006/relationships" xmlns:p="http://schemas.openxmlformats.org/presentationml/2006/main">
   <p:cSld>
+    <p:bg>
+      <p:bgRef idx="1001">
+        <a:schemeClr val="bg1"/>
+      </p:bgRef>
+    </p:bg>
     <p:spTree>
       <p:nvGrpSpPr>
         <p:cNvPr id="1" name=""/>
@@ -1037,6 +820,7 @@
         <a:solidFill>
           <a:srgbClr val="13203A"/>
         </a:solidFill>
+        <a:effectLst/>
       </p:bgPr>
     </p:bg>
     <p:spTree>
@@ -1055,14 +839,14 @@
       </p:grpSpPr>
       <p:pic>
         <p:nvPicPr>
-          <p:cNvPr id="2" name="Image 0" descr="preencoded.png">    </p:cNvPr>
+          <p:cNvPr id="2" name="Image 0" descr="preencoded.png"/>
           <p:cNvPicPr>
             <a:picLocks noChangeAspect="1"/>
           </p:cNvPicPr>
           <p:nvPr/>
         </p:nvPicPr>
         <p:blipFill>
-          <a:blip r:embed="rId1">
+          <a:blip r:embed="rId3">
             <a:alphaModFix amt="38000"/>
           </a:blip>
           <a:stretch>
@@ -1100,11 +884,11 @@
           <a:bodyPr wrap="square" lIns="0" tIns="0" rIns="0" bIns="0" rtlCol="0" anchor="ctr"/>
           <a:lstStyle/>
           <a:p>
-            <a:pPr indent="0" marL="0">
-              <a:buNone/>
-            </a:pPr>
-            <a:r>
-              <a:rPr lang="en-US" sz="1000" b="1" spc="160" kern="0" dirty="0">
+            <a:pPr marL="0" indent="0">
+              <a:buNone/>
+            </a:pPr>
+            <a:r>
+              <a:rPr lang="en-US" sz="1000" b="1" kern="0" spc="160" dirty="0">
                 <a:solidFill>
                   <a:srgbClr val="F0B323"/>
                 </a:solidFill>
@@ -1139,7 +923,7 @@
           <a:bodyPr wrap="square" lIns="0" tIns="0" rIns="0" bIns="0" rtlCol="0" anchor="ctr"/>
           <a:lstStyle/>
           <a:p>
-            <a:pPr indent="0" marL="0">
+            <a:pPr marL="0" indent="0">
               <a:buNone/>
             </a:pPr>
             <a:r>
@@ -1178,7 +962,7 @@
           <a:bodyPr wrap="square" lIns="0" tIns="0" rIns="0" bIns="0" rtlCol="0" anchor="t"/>
           <a:lstStyle/>
           <a:p>
-            <a:pPr indent="0" marL="0">
+            <a:pPr marL="0" indent="0">
               <a:lnSpc>
                 <a:spcPts val="3100"/>
               </a:lnSpc>
@@ -1198,7 +982,7 @@
             <a:endParaRPr lang="en-US" sz="2100" dirty="0"/>
           </a:p>
           <a:p>
-            <a:pPr indent="0" marL="0">
+            <a:pPr marL="0" indent="0">
               <a:lnSpc>
                 <a:spcPts val="3100"/>
               </a:lnSpc>
@@ -1241,6 +1025,13 @@
             <a:prstDash val="solid"/>
           </a:ln>
         </p:spPr>
+        <p:txBody>
+          <a:bodyPr/>
+          <a:lstStyle/>
+          <a:p>
+            <a:endParaRPr lang="en-US"/>
+          </a:p>
+        </p:txBody>
       </p:sp>
       <p:sp>
         <p:nvSpPr>
@@ -1263,11 +1054,11 @@
           <a:bodyPr wrap="square" lIns="0" tIns="0" rIns="0" bIns="0" rtlCol="0" anchor="ctr"/>
           <a:lstStyle/>
           <a:p>
-            <a:pPr indent="0" marL="0">
-              <a:buNone/>
-            </a:pPr>
-            <a:r>
-              <a:rPr lang="en-US" sz="1050" b="1" spc="120" kern="0" dirty="0">
+            <a:pPr marL="0" indent="0">
+              <a:buNone/>
+            </a:pPr>
+            <a:r>
+              <a:rPr lang="en-US" sz="1050" b="1" kern="0" spc="120" dirty="0">
                 <a:solidFill>
                   <a:srgbClr val="9AA6B8"/>
                 </a:solidFill>
@@ -1302,7 +1093,7 @@
           <a:bodyPr wrap="square" lIns="0" tIns="0" rIns="0" bIns="0" rtlCol="0" anchor="ctr"/>
           <a:lstStyle/>
           <a:p>
-            <a:pPr indent="0" marL="0">
+            <a:pPr marL="0" indent="0">
               <a:buNone/>
             </a:pPr>
             <a:r>
@@ -1341,7 +1132,7 @@
           <a:bodyPr wrap="square" lIns="0" tIns="0" rIns="0" bIns="0" rtlCol="0" anchor="t"/>
           <a:lstStyle/>
           <a:p>
-            <a:pPr indent="0" marL="0">
+            <a:pPr marL="0" indent="0">
               <a:buNone/>
             </a:pPr>
             <a:r>
@@ -1380,7 +1171,7 @@
           <a:bodyPr wrap="square" lIns="0" tIns="0" rIns="0" bIns="0" rtlCol="0" anchor="t"/>
           <a:lstStyle/>
           <a:p>
-            <a:pPr indent="0" marL="0">
+            <a:pPr marL="0" indent="0">
               <a:lnSpc>
                 <a:spcPts val="1400"/>
               </a:lnSpc>
@@ -1422,7 +1213,7 @@
           <a:bodyPr wrap="square" lIns="0" tIns="0" rIns="0" bIns="0" rtlCol="0" anchor="ctr"/>
           <a:lstStyle/>
           <a:p>
-            <a:pPr indent="0" marL="0">
+            <a:pPr marL="0" indent="0">
               <a:buNone/>
             </a:pPr>
             <a:r>
@@ -1461,7 +1252,7 @@
           <a:bodyPr wrap="square" lIns="0" tIns="0" rIns="0" bIns="0" rtlCol="0" anchor="t"/>
           <a:lstStyle/>
           <a:p>
-            <a:pPr indent="0" marL="0">
+            <a:pPr marL="0" indent="0">
               <a:buNone/>
             </a:pPr>
             <a:r>
@@ -1500,7 +1291,7 @@
           <a:bodyPr wrap="square" lIns="0" tIns="0" rIns="0" bIns="0" rtlCol="0" anchor="t"/>
           <a:lstStyle/>
           <a:p>
-            <a:pPr indent="0" marL="0">
+            <a:pPr marL="0" indent="0">
               <a:lnSpc>
                 <a:spcPts val="1400"/>
               </a:lnSpc>
@@ -1542,7 +1333,7 @@
           <a:bodyPr wrap="square" lIns="0" tIns="0" rIns="0" bIns="0" rtlCol="0" anchor="ctr"/>
           <a:lstStyle/>
           <a:p>
-            <a:pPr indent="0" marL="0">
+            <a:pPr marL="0" indent="0">
               <a:buNone/>
             </a:pPr>
             <a:r>
@@ -1581,7 +1372,7 @@
           <a:bodyPr wrap="square" lIns="0" tIns="0" rIns="0" bIns="0" rtlCol="0" anchor="t"/>
           <a:lstStyle/>
           <a:p>
-            <a:pPr indent="0" marL="0">
+            <a:pPr marL="0" indent="0">
               <a:buNone/>
             </a:pPr>
             <a:r>
@@ -1620,7 +1411,7 @@
           <a:bodyPr wrap="square" lIns="0" tIns="0" rIns="0" bIns="0" rtlCol="0" anchor="t"/>
           <a:lstStyle/>
           <a:p>
-            <a:pPr indent="0" marL="0">
+            <a:pPr marL="0" indent="0">
               <a:lnSpc>
                 <a:spcPts val="1400"/>
               </a:lnSpc>
@@ -1662,7 +1453,7 @@
           <a:bodyPr wrap="square" lIns="0" tIns="0" rIns="0" bIns="0" rtlCol="0" anchor="ctr"/>
           <a:lstStyle/>
           <a:p>
-            <a:pPr indent="0" marL="0">
+            <a:pPr marL="0" indent="0">
               <a:buNone/>
             </a:pPr>
             <a:r>
@@ -1701,7 +1492,7 @@
           <a:bodyPr wrap="square" lIns="0" tIns="0" rIns="0" bIns="0" rtlCol="0" anchor="ctr"/>
           <a:lstStyle/>
           <a:p>
-            <a:pPr algn="r" indent="0" marL="0">
+            <a:pPr marL="0" indent="0" algn="r">
               <a:buNone/>
             </a:pPr>
             <a:r>
@@ -1735,6 +1526,7 @@
         <a:solidFill>
           <a:srgbClr val="FFFFFF"/>
         </a:solidFill>
+        <a:effectLst/>
       </p:bgPr>
     </p:bg>
     <p:spTree>
@@ -1772,7 +1564,7 @@
           <a:bodyPr wrap="square" lIns="0" tIns="0" rIns="0" bIns="0" rtlCol="0" anchor="ctr"/>
           <a:lstStyle/>
           <a:p>
-            <a:pPr indent="0" marL="0">
+            <a:pPr marL="0" indent="0">
               <a:buNone/>
             </a:pPr>
             <a:r>
@@ -1811,7 +1603,7 @@
           <a:bodyPr wrap="square" lIns="0" tIns="0" rIns="0" bIns="0" rtlCol="0" anchor="t"/>
           <a:lstStyle/>
           <a:p>
-            <a:pPr indent="0" marL="0">
+            <a:pPr marL="0" indent="0">
               <a:lnSpc>
                 <a:spcPts val="1900"/>
               </a:lnSpc>
@@ -1856,6 +1648,13 @@
             <a:prstDash val="solid"/>
           </a:ln>
         </p:spPr>
+        <p:txBody>
+          <a:bodyPr/>
+          <a:lstStyle/>
+          <a:p>
+            <a:endParaRPr lang="en-US"/>
+          </a:p>
+        </p:txBody>
       </p:sp>
       <p:sp>
         <p:nvSpPr>
@@ -1878,7 +1677,7 @@
           <a:bodyPr wrap="square" lIns="0" tIns="0" rIns="0" bIns="0" rtlCol="0" anchor="ctr"/>
           <a:lstStyle/>
           <a:p>
-            <a:pPr indent="0" marL="0">
+            <a:pPr marL="0" indent="0">
               <a:buNone/>
             </a:pPr>
             <a:r>
@@ -1917,11 +1716,11 @@
           <a:bodyPr wrap="square" lIns="0" tIns="0" rIns="0" bIns="0" rtlCol="0" anchor="ctr"/>
           <a:lstStyle/>
           <a:p>
-            <a:pPr indent="0" marL="0">
-              <a:buNone/>
-            </a:pPr>
-            <a:r>
-              <a:rPr lang="en-US" sz="1250" b="1" spc="160" kern="0" dirty="0">
+            <a:pPr marL="0" indent="0">
+              <a:buNone/>
+            </a:pPr>
+            <a:r>
+              <a:rPr lang="en-US" sz="1250" b="1" kern="0" spc="160" dirty="0">
                 <a:solidFill>
                   <a:srgbClr val="2E8B84"/>
                 </a:solidFill>
@@ -1956,7 +1755,7 @@
           <a:bodyPr wrap="square" lIns="0" tIns="0" rIns="0" bIns="0" rtlCol="0" anchor="t"/>
           <a:lstStyle/>
           <a:p>
-            <a:pPr indent="0" marL="0">
+            <a:pPr marL="0" indent="0">
               <a:lnSpc>
                 <a:spcPts val="1800"/>
               </a:lnSpc>
@@ -1998,7 +1797,7 @@
           <a:bodyPr wrap="square" lIns="0" tIns="0" rIns="0" bIns="0" rtlCol="0" anchor="t"/>
           <a:lstStyle/>
           <a:p>
-            <a:pPr indent="0" marL="0">
+            <a:pPr marL="0" indent="0">
               <a:lnSpc>
                 <a:spcPts val="1350"/>
               </a:lnSpc>
@@ -2043,6 +1842,13 @@
             <a:prstDash val="solid"/>
           </a:ln>
         </p:spPr>
+        <p:txBody>
+          <a:bodyPr/>
+          <a:lstStyle/>
+          <a:p>
+            <a:endParaRPr lang="en-US"/>
+          </a:p>
+        </p:txBody>
       </p:sp>
       <p:sp>
         <p:nvSpPr>
@@ -2065,7 +1871,7 @@
           <a:bodyPr wrap="square" lIns="0" tIns="0" rIns="0" bIns="0" rtlCol="0" anchor="ctr"/>
           <a:lstStyle/>
           <a:p>
-            <a:pPr indent="0" marL="0">
+            <a:pPr marL="0" indent="0">
               <a:buNone/>
             </a:pPr>
             <a:r>
@@ -2104,11 +1910,11 @@
           <a:bodyPr wrap="square" lIns="0" tIns="0" rIns="0" bIns="0" rtlCol="0" anchor="ctr"/>
           <a:lstStyle/>
           <a:p>
-            <a:pPr indent="0" marL="0">
-              <a:buNone/>
-            </a:pPr>
-            <a:r>
-              <a:rPr lang="en-US" sz="1250" b="1" spc="160" kern="0" dirty="0">
+            <a:pPr marL="0" indent="0">
+              <a:buNone/>
+            </a:pPr>
+            <a:r>
+              <a:rPr lang="en-US" sz="1250" b="1" kern="0" spc="160" dirty="0">
                 <a:solidFill>
                   <a:srgbClr val="C9A227"/>
                 </a:solidFill>
@@ -2143,7 +1949,7 @@
           <a:bodyPr wrap="square" lIns="0" tIns="0" rIns="0" bIns="0" rtlCol="0" anchor="t"/>
           <a:lstStyle/>
           <a:p>
-            <a:pPr indent="0" marL="0">
+            <a:pPr marL="0" indent="0">
               <a:lnSpc>
                 <a:spcPts val="1800"/>
               </a:lnSpc>
@@ -2185,7 +1991,7 @@
           <a:bodyPr wrap="square" lIns="0" tIns="0" rIns="0" bIns="0" rtlCol="0" anchor="t"/>
           <a:lstStyle/>
           <a:p>
-            <a:pPr indent="0" marL="0">
+            <a:pPr marL="0" indent="0">
               <a:lnSpc>
                 <a:spcPts val="1350"/>
               </a:lnSpc>
@@ -2230,6 +2036,13 @@
             <a:prstDash val="solid"/>
           </a:ln>
         </p:spPr>
+        <p:txBody>
+          <a:bodyPr/>
+          <a:lstStyle/>
+          <a:p>
+            <a:endParaRPr lang="en-US"/>
+          </a:p>
+        </p:txBody>
       </p:sp>
       <p:sp>
         <p:nvSpPr>
@@ -2252,7 +2065,7 @@
           <a:bodyPr wrap="square" lIns="0" tIns="0" rIns="0" bIns="0" rtlCol="0" anchor="ctr"/>
           <a:lstStyle/>
           <a:p>
-            <a:pPr indent="0" marL="0">
+            <a:pPr marL="0" indent="0">
               <a:buNone/>
             </a:pPr>
             <a:r>
@@ -2291,11 +2104,11 @@
           <a:bodyPr wrap="square" lIns="0" tIns="0" rIns="0" bIns="0" rtlCol="0" anchor="ctr"/>
           <a:lstStyle/>
           <a:p>
-            <a:pPr indent="0" marL="0">
-              <a:buNone/>
-            </a:pPr>
-            <a:r>
-              <a:rPr lang="en-US" sz="1250" b="1" spc="160" kern="0" dirty="0">
+            <a:pPr marL="0" indent="0">
+              <a:buNone/>
+            </a:pPr>
+            <a:r>
+              <a:rPr lang="en-US" sz="1250" b="1" kern="0" spc="160" dirty="0">
                 <a:solidFill>
                   <a:srgbClr val="2E8B84"/>
                 </a:solidFill>
@@ -2330,7 +2143,7 @@
           <a:bodyPr wrap="square" lIns="0" tIns="0" rIns="0" bIns="0" rtlCol="0" anchor="t"/>
           <a:lstStyle/>
           <a:p>
-            <a:pPr indent="0" marL="0">
+            <a:pPr marL="0" indent="0">
               <a:lnSpc>
                 <a:spcPts val="1800"/>
               </a:lnSpc>
@@ -2372,7 +2185,7 @@
           <a:bodyPr wrap="square" lIns="0" tIns="0" rIns="0" bIns="0" rtlCol="0" anchor="t"/>
           <a:lstStyle/>
           <a:p>
-            <a:pPr indent="0" marL="0">
+            <a:pPr marL="0" indent="0">
               <a:lnSpc>
                 <a:spcPts val="1350"/>
               </a:lnSpc>
@@ -2417,6 +2230,13 @@
             <a:prstDash val="solid"/>
           </a:ln>
         </p:spPr>
+        <p:txBody>
+          <a:bodyPr/>
+          <a:lstStyle/>
+          <a:p>
+            <a:endParaRPr lang="en-US"/>
+          </a:p>
+        </p:txBody>
       </p:sp>
       <p:sp>
         <p:nvSpPr>
@@ -2439,7 +2259,7 @@
           <a:bodyPr wrap="square" lIns="0" tIns="0" rIns="0" bIns="0" rtlCol="0" anchor="ctr"/>
           <a:lstStyle/>
           <a:p>
-            <a:pPr indent="0" marL="0">
+            <a:pPr marL="0" indent="0">
               <a:buNone/>
             </a:pPr>
             <a:r>
@@ -2478,11 +2298,11 @@
           <a:bodyPr wrap="square" lIns="0" tIns="0" rIns="0" bIns="0" rtlCol="0" anchor="ctr"/>
           <a:lstStyle/>
           <a:p>
-            <a:pPr indent="0" marL="0">
-              <a:buNone/>
-            </a:pPr>
-            <a:r>
-              <a:rPr lang="en-US" sz="1250" b="1" spc="160" kern="0" dirty="0">
+            <a:pPr marL="0" indent="0">
+              <a:buNone/>
+            </a:pPr>
+            <a:r>
+              <a:rPr lang="en-US" sz="1250" b="1" kern="0" spc="160" dirty="0">
                 <a:solidFill>
                   <a:srgbClr val="C9A227"/>
                 </a:solidFill>
@@ -2517,7 +2337,7 @@
           <a:bodyPr wrap="square" lIns="0" tIns="0" rIns="0" bIns="0" rtlCol="0" anchor="t"/>
           <a:lstStyle/>
           <a:p>
-            <a:pPr indent="0" marL="0">
+            <a:pPr marL="0" indent="0">
               <a:lnSpc>
                 <a:spcPts val="1800"/>
               </a:lnSpc>
@@ -2559,7 +2379,7 @@
           <a:bodyPr wrap="square" lIns="0" tIns="0" rIns="0" bIns="0" rtlCol="0" anchor="t"/>
           <a:lstStyle/>
           <a:p>
-            <a:pPr indent="0" marL="0">
+            <a:pPr marL="0" indent="0">
               <a:lnSpc>
                 <a:spcPts val="1350"/>
               </a:lnSpc>
@@ -2601,11 +2421,11 @@
           <a:bodyPr wrap="square" lIns="0" tIns="0" rIns="0" bIns="0" rtlCol="0" anchor="ctr"/>
           <a:lstStyle/>
           <a:p>
-            <a:pPr indent="0" marL="0">
-              <a:buNone/>
-            </a:pPr>
-            <a:r>
-              <a:rPr lang="en-US" sz="1050" b="1" spc="120" kern="0" dirty="0">
+            <a:pPr marL="0" indent="0">
+              <a:buNone/>
+            </a:pPr>
+            <a:r>
+              <a:rPr lang="en-US" sz="1050" b="1" kern="0" spc="120" dirty="0">
                 <a:solidFill>
                   <a:srgbClr val="5C6E8C"/>
                 </a:solidFill>
@@ -2640,7 +2460,7 @@
           <a:bodyPr wrap="square" lIns="0" tIns="0" rIns="0" bIns="0" rtlCol="0" anchor="ctr"/>
           <a:lstStyle/>
           <a:p>
-            <a:pPr indent="0" marL="0">
+            <a:pPr marL="0" indent="0">
               <a:buNone/>
             </a:pPr>
             <a:r>
@@ -2679,7 +2499,7 @@
           <a:bodyPr wrap="square" lIns="0" tIns="0" rIns="0" bIns="0" rtlCol="0" anchor="t"/>
           <a:lstStyle/>
           <a:p>
-            <a:pPr indent="0" marL="0">
+            <a:pPr marL="0" indent="0">
               <a:lnSpc>
                 <a:spcPts val="1300"/>
               </a:lnSpc>
@@ -2721,7 +2541,7 @@
           <a:bodyPr wrap="square" lIns="0" tIns="0" rIns="0" bIns="0" rtlCol="0" anchor="ctr"/>
           <a:lstStyle/>
           <a:p>
-            <a:pPr indent="0" marL="0">
+            <a:pPr marL="0" indent="0">
               <a:buNone/>
             </a:pPr>
             <a:r>
@@ -2760,7 +2580,7 @@
           <a:bodyPr wrap="square" lIns="0" tIns="0" rIns="0" bIns="0" rtlCol="0" anchor="t"/>
           <a:lstStyle/>
           <a:p>
-            <a:pPr indent="0" marL="0">
+            <a:pPr marL="0" indent="0">
               <a:lnSpc>
                 <a:spcPts val="1300"/>
               </a:lnSpc>
@@ -2802,7 +2622,7 @@
           <a:bodyPr wrap="square" lIns="0" tIns="0" rIns="0" bIns="0" rtlCol="0" anchor="ctr"/>
           <a:lstStyle/>
           <a:p>
-            <a:pPr indent="0" marL="0">
+            <a:pPr marL="0" indent="0">
               <a:buNone/>
             </a:pPr>
             <a:r>
@@ -2841,7 +2661,7 @@
           <a:bodyPr wrap="square" lIns="0" tIns="0" rIns="0" bIns="0" rtlCol="0" anchor="t"/>
           <a:lstStyle/>
           <a:p>
-            <a:pPr indent="0" marL="0">
+            <a:pPr marL="0" indent="0">
               <a:lnSpc>
                 <a:spcPts val="1300"/>
               </a:lnSpc>
@@ -2883,7 +2703,7 @@
           <a:bodyPr wrap="square" lIns="0" tIns="0" rIns="0" bIns="0" rtlCol="0" anchor="ctr"/>
           <a:lstStyle/>
           <a:p>
-            <a:pPr indent="0" marL="0">
+            <a:pPr marL="0" indent="0">
               <a:buNone/>
             </a:pPr>
             <a:r>
@@ -2922,7 +2742,7 @@
           <a:bodyPr wrap="square" lIns="0" tIns="0" rIns="0" bIns="0" rtlCol="0" anchor="t"/>
           <a:lstStyle/>
           <a:p>
-            <a:pPr indent="0" marL="0">
+            <a:pPr marL="0" indent="0">
               <a:lnSpc>
                 <a:spcPts val="1300"/>
               </a:lnSpc>
@@ -2962,6 +2782,13 @@
           </a:solidFill>
           <a:ln/>
         </p:spPr>
+        <p:txBody>
+          <a:bodyPr/>
+          <a:lstStyle/>
+          <a:p>
+            <a:endParaRPr lang="en-US"/>
+          </a:p>
+        </p:txBody>
       </p:sp>
       <p:sp>
         <p:nvSpPr>
@@ -2984,7 +2811,7 @@
           <a:bodyPr wrap="square" lIns="0" tIns="0" rIns="0" bIns="0" rtlCol="0" anchor="ctr"/>
           <a:lstStyle/>
           <a:p>
-            <a:pPr indent="0" marL="0">
+            <a:pPr marL="0" indent="0">
               <a:lnSpc>
                 <a:spcPts val="1700"/>
               </a:lnSpc>
@@ -3001,12 +2828,6 @@
               </a:rPr>
               <a:t>Human in the loop, not in the way.  </a:t>
             </a:r>
-            <a:pPr indent="0" marL="0">
-              <a:lnSpc>
-                <a:spcPts val="1700"/>
-              </a:lnSpc>
-              <a:buNone/>
-            </a:pPr>
             <a:r>
               <a:rPr lang="en-US" sz="1350" dirty="0">
                 <a:solidFill>
@@ -3044,6 +2865,13 @@
             <a:prstDash val="solid"/>
           </a:ln>
         </p:spPr>
+        <p:txBody>
+          <a:bodyPr/>
+          <a:lstStyle/>
+          <a:p>
+            <a:endParaRPr lang="en-US"/>
+          </a:p>
+        </p:txBody>
       </p:sp>
       <p:sp>
         <p:nvSpPr>
@@ -3066,7 +2894,7 @@
           <a:bodyPr wrap="square" lIns="0" tIns="0" rIns="0" bIns="0" rtlCol="0" anchor="ctr"/>
           <a:lstStyle/>
           <a:p>
-            <a:pPr indent="0" marL="0">
+            <a:pPr marL="0" indent="0">
               <a:buNone/>
             </a:pPr>
             <a:r>
@@ -3105,7 +2933,7 @@
           <a:bodyPr wrap="square" lIns="0" tIns="0" rIns="0" bIns="0" rtlCol="0" anchor="ctr"/>
           <a:lstStyle/>
           <a:p>
-            <a:pPr algn="r" indent="0" marL="0">
+            <a:pPr marL="0" indent="0" algn="r">
               <a:buNone/>
             </a:pPr>
             <a:r>
@@ -3139,6 +2967,7 @@
         <a:solidFill>
           <a:srgbClr val="13203A"/>
         </a:solidFill>
+        <a:effectLst/>
       </p:bgPr>
     </p:bg>
     <p:spTree>
@@ -3176,11 +3005,11 @@
           <a:bodyPr wrap="square" lIns="0" tIns="0" rIns="0" bIns="0" rtlCol="0" anchor="ctr"/>
           <a:lstStyle/>
           <a:p>
-            <a:pPr indent="0" marL="0">
-              <a:buNone/>
-            </a:pPr>
-            <a:r>
-              <a:rPr lang="en-US" sz="1050" b="1" spc="160" kern="0" dirty="0">
+            <a:pPr marL="0" indent="0">
+              <a:buNone/>
+            </a:pPr>
+            <a:r>
+              <a:rPr lang="en-US" sz="1050" b="1" kern="0" spc="160" dirty="0">
                 <a:solidFill>
                   <a:srgbClr val="F0B323"/>
                 </a:solidFill>
@@ -3215,7 +3044,7 @@
           <a:bodyPr wrap="square" lIns="0" tIns="0" rIns="0" bIns="0" rtlCol="0" anchor="ctr"/>
           <a:lstStyle/>
           <a:p>
-            <a:pPr indent="0" marL="0">
+            <a:pPr marL="0" indent="0">
               <a:buNone/>
             </a:pPr>
             <a:r>
@@ -3254,7 +3083,7 @@
           <a:bodyPr wrap="square" lIns="0" tIns="0" rIns="0" bIns="0" rtlCol="0" anchor="t"/>
           <a:lstStyle/>
           <a:p>
-            <a:pPr indent="0" marL="0">
+            <a:pPr marL="0" indent="0">
               <a:buNone/>
             </a:pPr>
             <a:r>
@@ -3291,6 +3120,13 @@
           </a:solidFill>
           <a:ln/>
         </p:spPr>
+        <p:txBody>
+          <a:bodyPr/>
+          <a:lstStyle/>
+          <a:p>
+            <a:endParaRPr lang="en-US"/>
+          </a:p>
+        </p:txBody>
       </p:sp>
       <p:sp>
         <p:nvSpPr>
@@ -3313,7 +3149,7 @@
           <a:bodyPr wrap="square" lIns="0" tIns="0" rIns="0" bIns="0" rtlCol="0" anchor="ctr"/>
           <a:lstStyle/>
           <a:p>
-            <a:pPr algn="r" indent="0" marL="0">
+            <a:pPr marL="0" indent="0" algn="r">
               <a:buNone/>
             </a:pPr>
             <a:r>
@@ -3352,7 +3188,7 @@
           <a:bodyPr wrap="square" lIns="0" tIns="0" rIns="0" bIns="0" rtlCol="0" anchor="ctr"/>
           <a:lstStyle/>
           <a:p>
-            <a:pPr algn="ctr" indent="0" marL="0">
+            <a:pPr marL="0" indent="0" algn="ctr">
               <a:buNone/>
             </a:pPr>
             <a:r>
@@ -3391,7 +3227,7 @@
           <a:bodyPr wrap="square" lIns="0" tIns="0" rIns="0" bIns="0" rtlCol="0" anchor="ctr"/>
           <a:lstStyle/>
           <a:p>
-            <a:pPr algn="l" indent="0" marL="0">
+            <a:pPr marL="0" indent="0" algn="l">
               <a:buNone/>
             </a:pPr>
             <a:r>
@@ -3430,14 +3266,14 @@
           <a:bodyPr wrap="square" lIns="0" tIns="0" rIns="0" bIns="0" rtlCol="0" anchor="ctr"/>
           <a:lstStyle/>
           <a:p>
-            <a:pPr indent="0" marL="0">
+            <a:pPr marL="0" indent="0">
               <a:lnSpc>
                 <a:spcPts val="1100"/>
               </a:lnSpc>
               <a:buNone/>
             </a:pPr>
             <a:r>
-              <a:rPr lang="en-US" sz="900" b="1" spc="50" kern="0" dirty="0">
+              <a:rPr lang="en-US" sz="900" b="1" kern="0" spc="50" dirty="0">
                 <a:solidFill>
                   <a:srgbClr val="FFFFFF"/>
                 </a:solidFill>
@@ -3450,14 +3286,14 @@
             <a:endParaRPr lang="en-US" sz="900" dirty="0"/>
           </a:p>
           <a:p>
-            <a:pPr indent="0" marL="0">
+            <a:pPr marL="0" indent="0">
               <a:lnSpc>
                 <a:spcPts val="1100"/>
               </a:lnSpc>
               <a:buNone/>
             </a:pPr>
             <a:r>
-              <a:rPr lang="en-US" sz="900" b="1" spc="50" kern="0" dirty="0">
+              <a:rPr lang="en-US" sz="900" b="1" kern="0" spc="50" dirty="0">
                 <a:solidFill>
                   <a:srgbClr val="FFFFFF"/>
                 </a:solidFill>
@@ -3470,14 +3306,14 @@
             <a:endParaRPr lang="en-US" sz="900" dirty="0"/>
           </a:p>
           <a:p>
-            <a:pPr indent="0" marL="0">
+            <a:pPr marL="0" indent="0">
               <a:lnSpc>
                 <a:spcPts val="1100"/>
               </a:lnSpc>
               <a:buNone/>
             </a:pPr>
             <a:r>
-              <a:rPr lang="en-US" sz="900" b="1" spc="50" kern="0" dirty="0">
+              <a:rPr lang="en-US" sz="900" b="1" kern="0" spc="50" dirty="0">
                 <a:solidFill>
                   <a:srgbClr val="F0B323"/>
                 </a:solidFill>
@@ -3485,19 +3321,10 @@
                 <a:ea typeface="Calibri" pitchFamily="34" charset="-122"/>
                 <a:cs typeface="Calibri" pitchFamily="34" charset="-120"/>
               </a:rPr>
-              <a:t>CLASS VIII</a:t>
-            </a:r>
-            <a:endParaRPr lang="en-US" sz="900" dirty="0"/>
-          </a:p>
-          <a:p>
-            <a:pPr indent="0" marL="0">
-              <a:lnSpc>
-                <a:spcPts val="1100"/>
-              </a:lnSpc>
-              <a:buNone/>
-            </a:pPr>
-            <a:r>
-              <a:rPr lang="en-US" sz="900" b="1" spc="50" kern="0" dirty="0">
+              <a:t>Current-Priority</a:t>
+            </a:r>
+            <a:r>
+              <a:rPr lang="en-US" sz="900" b="1" kern="0" spc="50">
                 <a:solidFill>
                   <a:srgbClr val="F0B323"/>
                 </a:solidFill>
@@ -3505,7 +3332,7 @@
                 <a:ea typeface="Calibri" pitchFamily="34" charset="-122"/>
                 <a:cs typeface="Calibri" pitchFamily="34" charset="-120"/>
               </a:rPr>
-              <a:t>PUSH</a:t>
+              <a:t>, Proximity, &amp; Triage</a:t>
             </a:r>
             <a:endParaRPr lang="en-US" sz="900" dirty="0"/>
           </a:p>
@@ -3532,7 +3359,7 @@
           <a:bodyPr wrap="square" lIns="0" tIns="0" rIns="0" bIns="0" rtlCol="0" anchor="t"/>
           <a:lstStyle/>
           <a:p>
-            <a:pPr indent="0" marL="0">
+            <a:pPr marL="0" indent="0">
               <a:lnSpc>
                 <a:spcPts val="1350"/>
               </a:lnSpc>
@@ -3574,7 +3401,7 @@
           <a:bodyPr wrap="square" lIns="0" tIns="0" rIns="0" bIns="0" rtlCol="0" anchor="ctr"/>
           <a:lstStyle/>
           <a:p>
-            <a:pPr indent="0" marL="0">
+            <a:pPr marL="0" indent="0">
               <a:buNone/>
             </a:pPr>
             <a:r>
@@ -3613,7 +3440,7 @@
           <a:bodyPr wrap="square" lIns="0" tIns="0" rIns="0" bIns="0" rtlCol="0" anchor="t"/>
           <a:lstStyle/>
           <a:p>
-            <a:pPr indent="0" marL="0">
+            <a:pPr marL="0" indent="0">
               <a:buNone/>
             </a:pPr>
             <a:r>
@@ -3652,7 +3479,7 @@
           <a:bodyPr wrap="square" lIns="0" tIns="0" rIns="0" bIns="0" rtlCol="0" anchor="t"/>
           <a:lstStyle/>
           <a:p>
-            <a:pPr indent="0" marL="0">
+            <a:pPr marL="0" indent="0">
               <a:lnSpc>
                 <a:spcPts val="1400"/>
               </a:lnSpc>
@@ -3694,7 +3521,7 @@
           <a:bodyPr wrap="square" lIns="0" tIns="0" rIns="0" bIns="0" rtlCol="0" anchor="ctr"/>
           <a:lstStyle/>
           <a:p>
-            <a:pPr indent="0" marL="0">
+            <a:pPr marL="0" indent="0">
               <a:buNone/>
             </a:pPr>
             <a:r>
@@ -3733,7 +3560,7 @@
           <a:bodyPr wrap="square" lIns="0" tIns="0" rIns="0" bIns="0" rtlCol="0" anchor="t"/>
           <a:lstStyle/>
           <a:p>
-            <a:pPr indent="0" marL="0">
+            <a:pPr marL="0" indent="0">
               <a:buNone/>
             </a:pPr>
             <a:r>
@@ -3772,7 +3599,7 @@
           <a:bodyPr wrap="square" lIns="0" tIns="0" rIns="0" bIns="0" rtlCol="0" anchor="t"/>
           <a:lstStyle/>
           <a:p>
-            <a:pPr indent="0" marL="0">
+            <a:pPr marL="0" indent="0">
               <a:lnSpc>
                 <a:spcPts val="1400"/>
               </a:lnSpc>
@@ -3815,6 +3642,13 @@
             <a:prstDash val="solid"/>
           </a:ln>
         </p:spPr>
+        <p:txBody>
+          <a:bodyPr/>
+          <a:lstStyle/>
+          <a:p>
+            <a:endParaRPr lang="en-US"/>
+          </a:p>
+        </p:txBody>
       </p:sp>
       <p:sp>
         <p:nvSpPr>
@@ -3837,11 +3671,11 @@
           <a:bodyPr wrap="square" lIns="0" tIns="0" rIns="0" bIns="0" rtlCol="0" anchor="ctr"/>
           <a:lstStyle/>
           <a:p>
-            <a:pPr indent="0" marL="0">
-              <a:buNone/>
-            </a:pPr>
-            <a:r>
-              <a:rPr lang="en-US" sz="1050" b="1" spc="120" kern="0" dirty="0">
+            <a:pPr marL="0" indent="0">
+              <a:buNone/>
+            </a:pPr>
+            <a:r>
+              <a:rPr lang="en-US" sz="1050" b="1" kern="0" spc="120" dirty="0">
                 <a:solidFill>
                   <a:srgbClr val="9AA6B8"/>
                 </a:solidFill>
@@ -3876,7 +3710,7 @@
           <a:bodyPr wrap="square" lIns="0" tIns="0" rIns="0" bIns="0" rtlCol="0" anchor="ctr"/>
           <a:lstStyle/>
           <a:p>
-            <a:pPr indent="0" marL="0">
+            <a:pPr marL="0" indent="0">
               <a:buNone/>
             </a:pPr>
             <a:r>
@@ -3915,7 +3749,7 @@
           <a:bodyPr wrap="square" lIns="0" tIns="0" rIns="0" bIns="0" rtlCol="0" anchor="t"/>
           <a:lstStyle/>
           <a:p>
-            <a:pPr indent="0" marL="0">
+            <a:pPr marL="0" indent="0">
               <a:lnSpc>
                 <a:spcPts val="1400"/>
               </a:lnSpc>
@@ -3957,7 +3791,7 @@
           <a:bodyPr wrap="square" lIns="0" tIns="0" rIns="0" bIns="0" rtlCol="0" anchor="ctr"/>
           <a:lstStyle/>
           <a:p>
-            <a:pPr indent="0" marL="0">
+            <a:pPr marL="0" indent="0">
               <a:buNone/>
             </a:pPr>
             <a:r>
@@ -3996,7 +3830,7 @@
           <a:bodyPr wrap="square" lIns="0" tIns="0" rIns="0" bIns="0" rtlCol="0" anchor="t"/>
           <a:lstStyle/>
           <a:p>
-            <a:pPr indent="0" marL="0">
+            <a:pPr marL="0" indent="0">
               <a:lnSpc>
                 <a:spcPts val="1400"/>
               </a:lnSpc>
@@ -4038,7 +3872,7 @@
           <a:bodyPr wrap="square" lIns="0" tIns="0" rIns="0" bIns="0" rtlCol="0" anchor="ctr"/>
           <a:lstStyle/>
           <a:p>
-            <a:pPr indent="0" marL="0">
+            <a:pPr marL="0" indent="0">
               <a:buNone/>
             </a:pPr>
             <a:r>
@@ -4077,7 +3911,7 @@
           <a:bodyPr wrap="square" lIns="0" tIns="0" rIns="0" bIns="0" rtlCol="0" anchor="t"/>
           <a:lstStyle/>
           <a:p>
-            <a:pPr indent="0" marL="0">
+            <a:pPr marL="0" indent="0">
               <a:lnSpc>
                 <a:spcPts val="1400"/>
               </a:lnSpc>
@@ -4120,6 +3954,13 @@
             <a:prstDash val="solid"/>
           </a:ln>
         </p:spPr>
+        <p:txBody>
+          <a:bodyPr/>
+          <a:lstStyle/>
+          <a:p>
+            <a:endParaRPr lang="en-US"/>
+          </a:p>
+        </p:txBody>
       </p:sp>
       <p:sp>
         <p:nvSpPr>
@@ -4142,7 +3983,7 @@
           <a:bodyPr wrap="square" lIns="0" tIns="0" rIns="0" bIns="0" rtlCol="0" anchor="ctr"/>
           <a:lstStyle/>
           <a:p>
-            <a:pPr indent="0" marL="0">
+            <a:pPr marL="0" indent="0">
               <a:buNone/>
             </a:pPr>
             <a:r>
@@ -4181,7 +4022,7 @@
           <a:bodyPr wrap="square" lIns="0" tIns="0" rIns="0" bIns="0" rtlCol="0" anchor="ctr"/>
           <a:lstStyle/>
           <a:p>
-            <a:pPr algn="r" indent="0" marL="0">
+            <a:pPr marL="0" indent="0" algn="r">
               <a:buNone/>
             </a:pPr>
             <a:r>
@@ -4500,4 +4341,319 @@
     </a:ext>
   </a:extLst>
 </a:theme>
+</file>
+
+<file path=ppt/theme/theme2.xml><?xml version="1.0" encoding="utf-8"?>
+<a:theme xmlns:a="http://schemas.openxmlformats.org/drawingml/2006/main" name="Office Theme">
+  <a:themeElements>
+    <a:clrScheme name="Office">
+      <a:dk1>
+        <a:sysClr val="windowText" lastClr="000000"/>
+      </a:dk1>
+      <a:lt1>
+        <a:sysClr val="window" lastClr="FFFFFF"/>
+      </a:lt1>
+      <a:dk2>
+        <a:srgbClr val="0E2841"/>
+      </a:dk2>
+      <a:lt2>
+        <a:srgbClr val="E8E8E8"/>
+      </a:lt2>
+      <a:accent1>
+        <a:srgbClr val="156082"/>
+      </a:accent1>
+      <a:accent2>
+        <a:srgbClr val="E97132"/>
+      </a:accent2>
+      <a:accent3>
+        <a:srgbClr val="196B24"/>
+      </a:accent3>
+      <a:accent4>
+        <a:srgbClr val="0F9ED5"/>
+      </a:accent4>
+      <a:accent5>
+        <a:srgbClr val="A02B93"/>
+      </a:accent5>
+      <a:accent6>
+        <a:srgbClr val="4EA72E"/>
+      </a:accent6>
+      <a:hlink>
+        <a:srgbClr val="467886"/>
+      </a:hlink>
+      <a:folHlink>
+        <a:srgbClr val="96607D"/>
+      </a:folHlink>
+    </a:clrScheme>
+    <a:fontScheme name="Office">
+      <a:majorFont>
+        <a:latin typeface="Aptos Display" panose="02110004020202020204"/>
+        <a:ea typeface=""/>
+        <a:cs typeface=""/>
+        <a:font script="Jpan" typeface="游ゴシック Light"/>
+        <a:font script="Hang" typeface="맑은 고딕"/>
+        <a:font script="Hans" typeface="等线 Light"/>
+        <a:font script="Hant" typeface="新細明體"/>
+        <a:font script="Arab" typeface="Times New Roman"/>
+        <a:font script="Hebr" typeface="Times New Roman"/>
+        <a:font script="Thai" typeface="Angsana New"/>
+        <a:font script="Ethi" typeface="Nyala"/>
+        <a:font script="Beng" typeface="Vrinda"/>
+        <a:font script="Gujr" typeface="Shruti"/>
+        <a:font script="Khmr" typeface="MoolBoran"/>
+        <a:font script="Knda" typeface="Tunga"/>
+        <a:font script="Guru" typeface="Raavi"/>
+        <a:font script="Cans" typeface="Euphemia"/>
+        <a:font script="Cher" typeface="Plantagenet Cherokee"/>
+        <a:font script="Yiii" typeface="Microsoft Yi Baiti"/>
+        <a:font script="Tibt" typeface="Microsoft Himalaya"/>
+        <a:font script="Thaa" typeface="MV Boli"/>
+        <a:font script="Deva" typeface="Mangal"/>
+        <a:font script="Telu" typeface="Gautami"/>
+        <a:font script="Taml" typeface="Latha"/>
+        <a:font script="Syrc" typeface="Estrangelo Edessa"/>
+        <a:font script="Orya" typeface="Kalinga"/>
+        <a:font script="Mlym" typeface="Kartika"/>
+        <a:font script="Laoo" typeface="DokChampa"/>
+        <a:font script="Sinh" typeface="Iskoola Pota"/>
+        <a:font script="Mong" typeface="Mongolian Baiti"/>
+        <a:font script="Viet" typeface="Times New Roman"/>
+        <a:font script="Uigh" typeface="Microsoft Uighur"/>
+        <a:font script="Geor" typeface="Sylfaen"/>
+        <a:font script="Armn" typeface="Arial"/>
+        <a:font script="Bugi" typeface="Leelawadee UI"/>
+        <a:font script="Bopo" typeface="Microsoft JhengHei"/>
+        <a:font script="Java" typeface="Javanese Text"/>
+        <a:font script="Lisu" typeface="Segoe UI"/>
+        <a:font script="Mymr" typeface="Myanmar Text"/>
+        <a:font script="Nkoo" typeface="Ebrima"/>
+        <a:font script="Olck" typeface="Nirmala UI"/>
+        <a:font script="Osma" typeface="Ebrima"/>
+        <a:font script="Phag" typeface="Phagspa"/>
+        <a:font script="Syrn" typeface="Estrangelo Edessa"/>
+        <a:font script="Syrj" typeface="Estrangelo Edessa"/>
+        <a:font script="Syre" typeface="Estrangelo Edessa"/>
+        <a:font script="Sora" typeface="Nirmala UI"/>
+        <a:font script="Tale" typeface="Microsoft Tai Le"/>
+        <a:font script="Talu" typeface="Microsoft New Tai Lue"/>
+        <a:font script="Tfng" typeface="Ebrima"/>
+      </a:majorFont>
+      <a:minorFont>
+        <a:latin typeface="Aptos" panose="02110004020202020204"/>
+        <a:ea typeface=""/>
+        <a:cs typeface=""/>
+        <a:font script="Jpan" typeface="游ゴシック"/>
+        <a:font script="Hang" typeface="맑은 고딕"/>
+        <a:font script="Hans" typeface="等线"/>
+        <a:font script="Hant" typeface="新細明體"/>
+        <a:font script="Arab" typeface="Arial"/>
+        <a:font script="Hebr" typeface="Arial"/>
+        <a:font script="Thai" typeface="Cordia New"/>
+        <a:font script="Ethi" typeface="Nyala"/>
+        <a:font script="Beng" typeface="Vrinda"/>
+        <a:font script="Gujr" typeface="Shruti"/>
+        <a:font script="Khmr" typeface="DaunPenh"/>
+        <a:font script="Knda" typeface="Tunga"/>
+        <a:font script="Guru" typeface="Raavi"/>
+        <a:font script="Cans" typeface="Euphemia"/>
+        <a:font script="Cher" typeface="Plantagenet Cherokee"/>
+        <a:font script="Yiii" typeface="Microsoft Yi Baiti"/>
+        <a:font script="Tibt" typeface="Microsoft Himalaya"/>
+        <a:font script="Thaa" typeface="MV Boli"/>
+        <a:font script="Deva" typeface="Mangal"/>
+        <a:font script="Telu" typeface="Gautami"/>
+        <a:font script="Taml" typeface="Latha"/>
+        <a:font script="Syrc" typeface="Estrangelo Edessa"/>
+        <a:font script="Orya" typeface="Kalinga"/>
+        <a:font script="Mlym" typeface="Kartika"/>
+        <a:font script="Laoo" typeface="DokChampa"/>
+        <a:font script="Sinh" typeface="Iskoola Pota"/>
+        <a:font script="Mong" typeface="Mongolian Baiti"/>
+        <a:font script="Viet" typeface="Arial"/>
+        <a:font script="Uigh" typeface="Microsoft Uighur"/>
+        <a:font script="Geor" typeface="Sylfaen"/>
+        <a:font script="Armn" typeface="Arial"/>
+        <a:font script="Bugi" typeface="Leelawadee UI"/>
+        <a:font script="Bopo" typeface="Microsoft JhengHei"/>
+        <a:font script="Java" typeface="Javanese Text"/>
+        <a:font script="Lisu" typeface="Segoe UI"/>
+        <a:font script="Mymr" typeface="Myanmar Text"/>
+        <a:font script="Nkoo" typeface="Ebrima"/>
+        <a:font script="Olck" typeface="Nirmala UI"/>
+        <a:font script="Osma" typeface="Ebrima"/>
+        <a:font script="Phag" typeface="Phagspa"/>
+        <a:font script="Syrn" typeface="Estrangelo Edessa"/>
+        <a:font script="Syrj" typeface="Estrangelo Edessa"/>
+        <a:font script="Syre" typeface="Estrangelo Edessa"/>
+        <a:font script="Sora" typeface="Nirmala UI"/>
+        <a:font script="Tale" typeface="Microsoft Tai Le"/>
+        <a:font script="Talu" typeface="Microsoft New Tai Lue"/>
+        <a:font script="Tfng" typeface="Ebrima"/>
+      </a:minorFont>
+    </a:fontScheme>
+    <a:fmtScheme name="Office">
+      <a:fillStyleLst>
+        <a:solidFill>
+          <a:schemeClr val="phClr"/>
+        </a:solidFill>
+        <a:gradFill rotWithShape="1">
+          <a:gsLst>
+            <a:gs pos="0">
+              <a:schemeClr val="phClr">
+                <a:lumMod val="110000"/>
+                <a:satMod val="105000"/>
+                <a:tint val="67000"/>
+              </a:schemeClr>
+            </a:gs>
+            <a:gs pos="50000">
+              <a:schemeClr val="phClr">
+                <a:lumMod val="105000"/>
+                <a:satMod val="103000"/>
+                <a:tint val="73000"/>
+              </a:schemeClr>
+            </a:gs>
+            <a:gs pos="100000">
+              <a:schemeClr val="phClr">
+                <a:lumMod val="105000"/>
+                <a:satMod val="109000"/>
+                <a:tint val="81000"/>
+              </a:schemeClr>
+            </a:gs>
+          </a:gsLst>
+          <a:lin ang="5400000" scaled="0"/>
+        </a:gradFill>
+        <a:gradFill rotWithShape="1">
+          <a:gsLst>
+            <a:gs pos="0">
+              <a:schemeClr val="phClr">
+                <a:satMod val="103000"/>
+                <a:lumMod val="102000"/>
+                <a:tint val="94000"/>
+              </a:schemeClr>
+            </a:gs>
+            <a:gs pos="50000">
+              <a:schemeClr val="phClr">
+                <a:satMod val="110000"/>
+                <a:lumMod val="100000"/>
+                <a:shade val="100000"/>
+              </a:schemeClr>
+            </a:gs>
+            <a:gs pos="100000">
+              <a:schemeClr val="phClr">
+                <a:lumMod val="99000"/>
+                <a:satMod val="120000"/>
+                <a:shade val="78000"/>
+              </a:schemeClr>
+            </a:gs>
+          </a:gsLst>
+          <a:lin ang="5400000" scaled="0"/>
+        </a:gradFill>
+      </a:fillStyleLst>
+      <a:lnStyleLst>
+        <a:ln w="12700" cap="flat" cmpd="sng" algn="ctr">
+          <a:solidFill>
+            <a:schemeClr val="phClr"/>
+          </a:solidFill>
+          <a:prstDash val="solid"/>
+          <a:miter lim="800000"/>
+        </a:ln>
+        <a:ln w="19050" cap="flat" cmpd="sng" algn="ctr">
+          <a:solidFill>
+            <a:schemeClr val="phClr"/>
+          </a:solidFill>
+          <a:prstDash val="solid"/>
+          <a:miter lim="800000"/>
+        </a:ln>
+        <a:ln w="25400" cap="flat" cmpd="sng" algn="ctr">
+          <a:solidFill>
+            <a:schemeClr val="phClr"/>
+          </a:solidFill>
+          <a:prstDash val="solid"/>
+          <a:miter lim="800000"/>
+        </a:ln>
+      </a:lnStyleLst>
+      <a:effectStyleLst>
+        <a:effectStyle>
+          <a:effectLst/>
+        </a:effectStyle>
+        <a:effectStyle>
+          <a:effectLst/>
+        </a:effectStyle>
+        <a:effectStyle>
+          <a:effectLst>
+            <a:outerShdw blurRad="57150" dist="19050" dir="5400000" algn="ctr" rotWithShape="0">
+              <a:srgbClr val="000000">
+                <a:alpha val="63000"/>
+              </a:srgbClr>
+            </a:outerShdw>
+          </a:effectLst>
+        </a:effectStyle>
+      </a:effectStyleLst>
+      <a:bgFillStyleLst>
+        <a:solidFill>
+          <a:schemeClr val="phClr"/>
+        </a:solidFill>
+        <a:solidFill>
+          <a:schemeClr val="phClr">
+            <a:tint val="95000"/>
+            <a:satMod val="170000"/>
+          </a:schemeClr>
+        </a:solidFill>
+        <a:gradFill rotWithShape="1">
+          <a:gsLst>
+            <a:gs pos="0">
+              <a:schemeClr val="phClr">
+                <a:tint val="93000"/>
+                <a:satMod val="150000"/>
+                <a:shade val="98000"/>
+                <a:lumMod val="102000"/>
+              </a:schemeClr>
+            </a:gs>
+            <a:gs pos="50000">
+              <a:schemeClr val="phClr">
+                <a:tint val="98000"/>
+                <a:satMod val="130000"/>
+                <a:shade val="90000"/>
+                <a:lumMod val="103000"/>
+              </a:schemeClr>
+            </a:gs>
+            <a:gs pos="100000">
+              <a:schemeClr val="phClr">
+                <a:shade val="63000"/>
+                <a:satMod val="120000"/>
+              </a:schemeClr>
+            </a:gs>
+          </a:gsLst>
+          <a:lin ang="5400000" scaled="0"/>
+        </a:gradFill>
+      </a:bgFillStyleLst>
+    </a:fmtScheme>
+  </a:themeElements>
+  <a:objectDefaults>
+    <a:lnDef>
+      <a:spPr/>
+      <a:bodyPr/>
+      <a:lstStyle/>
+      <a:style>
+        <a:lnRef idx="2">
+          <a:schemeClr val="accent1"/>
+        </a:lnRef>
+        <a:fillRef idx="0">
+          <a:schemeClr val="accent1"/>
+        </a:fillRef>
+        <a:effectRef idx="1">
+          <a:schemeClr val="accent1"/>
+        </a:effectRef>
+        <a:fontRef idx="minor">
+          <a:schemeClr val="tx1"/>
+        </a:fontRef>
+      </a:style>
+    </a:lnDef>
+  </a:objectDefaults>
+  <a:extraClrSchemeLst/>
+  <a:extLst>
+    <a:ext uri="{05A4C25C-085E-4340-85A3-A5531E510DB2}">
+      <thm15:themeFamily xmlns:thm15="http://schemas.microsoft.com/office/thememl/2012/main" name="Office Theme" id="{2E142A2C-CD16-42D6-873A-C26D2A0506FA}" vid="{1BDDFF52-6CD6-40A5-AB3C-68EB2F1E4D0A}"/>
+    </a:ext>
+  </a:extLst>
+</a:theme>
 </file>